--- a/dist/초4/사회·역사/지역사와유산/초4_사회·역사_지역사와유산_02_지역의역사_학생용.pptx
+++ b/dist/초4/사회·역사/지역사와유산/초4_사회·역사_지역사와유산_02_지역의역사_학생용.pptx
@@ -120,13 +120,13 @@
   <p:extLst>
     <p:ext uri="{521415D9-36F7-43E2-AB2F-B90AF26B5E84}">
       <p14:sectionLst xmlns:p14="http://schemas.microsoft.com/office/powerpoint/2010/main">
-        <p14:section name="도입" id="{5fc7e929-17f5-ef1a-e97a-02748fa7415f}">
+        <p14:section name="도입" id="{7733a3db-9671-cf06-57b9-5559a2536891}">
           <p14:sldIdLst>
             <p14:sldId id="256"/>
             <p14:sldId id="257"/>
           </p14:sldIdLst>
         </p14:section>
-        <p14:section name="개념" id="{5b3ed716-c172-01d8-f549-94791cecb84b}">
+        <p14:section name="개념" id="{4ed31cf8-f2d9-20d4-444e-6629133fbc4e}">
           <p14:sldIdLst>
             <p14:sldId id="258"/>
             <p14:sldId id="259"/>
@@ -134,7 +134,7 @@
             <p14:sldId id="263"/>
           </p14:sldIdLst>
         </p14:section>
-        <p14:section name="연습" id="{c6903ab3-5f7b-66a8-e49a-c449e96e6434}">
+        <p14:section name="연습" id="{40a4050d-a96b-9866-a70c-1b2d7043efc1}">
           <p14:sldIdLst>
             <p14:sldId id="260"/>
             <p14:sldId id="262"/>
@@ -142,30 +142,30 @@
             <p14:sldId id="265"/>
           </p14:sldIdLst>
         </p14:section>
-        <p14:section name="개념" id="{01b6e1c4-eb38-16fe-920a-d876fe937735}">
+        <p14:section name="개념" id="{c3d03cb0-2b92-ac69-3738-dc6ec5cb1306}">
           <p14:sldIdLst/>
         </p14:section>
-        <p14:section name="연습" id="{2dcb32c8-d940-fb61-418f-78ebe220dd68}">
+        <p14:section name="연습" id="{851c3022-ab0c-372d-54a6-682a8cfb2f48}">
           <p14:sldIdLst/>
         </p14:section>
-        <p14:section name="개념" id="{54968464-14ab-3cd2-2d82-b09efc5d002d}">
+        <p14:section name="개념" id="{3059756c-fa5f-4323-df60-9f0de0901712}">
           <p14:sldIdLst/>
         </p14:section>
-        <p14:section name="연습" id="{33c53275-6f1d-c444-39fb-1d001062c50a}">
+        <p14:section name="연습" id="{b68c5c39-342a-93e7-aa74-3a26bf4d5bc2}">
           <p14:sldIdLst/>
         </p14:section>
-        <p14:section name="확인" id="{634c3f89-47c4-2ff8-016f-1fbc0e46679b}">
+        <p14:section name="확인" id="{6b9894b7-71b9-59ff-a4a8-e382999387f3}">
           <p14:sldIdLst>
             <p14:sldId id="266"/>
             <p14:sldId id="267"/>
           </p14:sldIdLst>
         </p14:section>
-        <p14:section name="정리" id="{92624e25-6c5c-18ba-f410-f4c92f78598d}">
+        <p14:section name="정리" id="{ea807ff5-0c70-aba1-03e0-2740df1b77c0}">
           <p14:sldIdLst>
             <p14:sldId id="268"/>
           </p14:sldIdLst>
         </p14:section>
-        <p14:section name="보충" id="{794d3663-7eff-23ac-d056-c29b61375b56}">
+        <p14:section name="보충" id="{e70ac53a-4541-3047-7769-f41ba068223c}">
           <p14:sldIdLst>
             <p14:sldId id="269"/>
           </p14:sldIdLst>
